--- a/Cource_LAB_CLoudAce_3_How to Create and Starting a VM Instance.pptx
+++ b/Cource_LAB_CLoudAce_3_How to Create and Starting a VM Instance.pptx
@@ -2422,7 +2422,7 @@
           <a:p>
             <a:fld id="{7A02337E-4703-49AB-8D81-EA2F8A6577FC}" type="datetimeFigureOut">
               <a:rPr lang="en-US" smtClean="0"/>
-              <a:t>9/3/2025</a:t>
+              <a:t>9/18/2026</a:t>
             </a:fld>
             <a:endParaRPr lang="en-US"/>
           </a:p>
@@ -2593,7 +2593,7 @@
           <a:p>
             <a:fld id="{7A02337E-4703-49AB-8D81-EA2F8A6577FC}" type="datetimeFigureOut">
               <a:rPr lang="en-US" smtClean="0"/>
-              <a:t>9/3/2025</a:t>
+              <a:t>9/18/2026</a:t>
             </a:fld>
             <a:endParaRPr lang="en-US"/>
           </a:p>
@@ -2774,7 +2774,7 @@
           <a:p>
             <a:fld id="{7A02337E-4703-49AB-8D81-EA2F8A6577FC}" type="datetimeFigureOut">
               <a:rPr lang="en-US" smtClean="0"/>
-              <a:t>9/3/2025</a:t>
+              <a:t>9/18/2026</a:t>
             </a:fld>
             <a:endParaRPr lang="en-US"/>
           </a:p>
@@ -2945,7 +2945,7 @@
           <a:p>
             <a:fld id="{48A87A34-81AB-432B-8DAE-1953F412C126}" type="datetimeFigureOut">
               <a:rPr lang="en-US" smtClean="0"/>
-              <a:t>9/3/2025</a:t>
+              <a:t>9/18/2026</a:t>
             </a:fld>
             <a:endParaRPr lang="en-US" dirty="0"/>
           </a:p>
@@ -3191,7 +3191,7 @@
           <a:p>
             <a:fld id="{7A02337E-4703-49AB-8D81-EA2F8A6577FC}" type="datetimeFigureOut">
               <a:rPr lang="en-US" smtClean="0"/>
-              <a:t>9/3/2025</a:t>
+              <a:t>9/18/2026</a:t>
             </a:fld>
             <a:endParaRPr lang="en-US"/>
           </a:p>
@@ -3424,7 +3424,7 @@
           <a:p>
             <a:fld id="{7A02337E-4703-49AB-8D81-EA2F8A6577FC}" type="datetimeFigureOut">
               <a:rPr lang="en-US" smtClean="0"/>
-              <a:t>9/3/2025</a:t>
+              <a:t>9/18/2026</a:t>
             </a:fld>
             <a:endParaRPr lang="en-US"/>
           </a:p>
@@ -3792,7 +3792,7 @@
           <a:p>
             <a:fld id="{7A02337E-4703-49AB-8D81-EA2F8A6577FC}" type="datetimeFigureOut">
               <a:rPr lang="en-US" smtClean="0"/>
-              <a:t>9/3/2025</a:t>
+              <a:t>9/18/2026</a:t>
             </a:fld>
             <a:endParaRPr lang="en-US"/>
           </a:p>
@@ -3911,7 +3911,7 @@
           <a:p>
             <a:fld id="{7A02337E-4703-49AB-8D81-EA2F8A6577FC}" type="datetimeFigureOut">
               <a:rPr lang="en-US" smtClean="0"/>
-              <a:t>9/3/2025</a:t>
+              <a:t>9/18/2026</a:t>
             </a:fld>
             <a:endParaRPr lang="en-US"/>
           </a:p>
@@ -4007,7 +4007,7 @@
           <a:p>
             <a:fld id="{7A02337E-4703-49AB-8D81-EA2F8A6577FC}" type="datetimeFigureOut">
               <a:rPr lang="en-US" smtClean="0"/>
-              <a:t>9/3/2025</a:t>
+              <a:t>9/18/2026</a:t>
             </a:fld>
             <a:endParaRPr lang="en-US"/>
           </a:p>
@@ -4285,7 +4285,7 @@
           <a:p>
             <a:fld id="{7A02337E-4703-49AB-8D81-EA2F8A6577FC}" type="datetimeFigureOut">
               <a:rPr lang="en-US" smtClean="0"/>
-              <a:t>9/3/2025</a:t>
+              <a:t>9/18/2026</a:t>
             </a:fld>
             <a:endParaRPr lang="en-US"/>
           </a:p>
@@ -4539,7 +4539,7 @@
           <a:p>
             <a:fld id="{7A02337E-4703-49AB-8D81-EA2F8A6577FC}" type="datetimeFigureOut">
               <a:rPr lang="en-US" smtClean="0"/>
-              <a:t>9/3/2025</a:t>
+              <a:t>9/18/2026</a:t>
             </a:fld>
             <a:endParaRPr lang="en-US"/>
           </a:p>
@@ -4753,7 +4753,7 @@
           <a:p>
             <a:fld id="{7A02337E-4703-49AB-8D81-EA2F8A6577FC}" type="datetimeFigureOut">
               <a:rPr lang="en-US" smtClean="0"/>
-              <a:t>9/3/2025</a:t>
+              <a:t>9/18/2026</a:t>
             </a:fld>
             <a:endParaRPr lang="en-US"/>
           </a:p>
@@ -5289,11 +5289,6 @@
                 </a:rPr>
                 <a:t>Vision</a:t>
               </a:r>
-              <a:endParaRPr lang="en-US" sz="3000" dirty="0">
-                <a:solidFill>
-                  <a:srgbClr val="00B0F0"/>
-                </a:solidFill>
-              </a:endParaRPr>
             </a:p>
           </p:txBody>
         </p:sp>
@@ -6533,104 +6528,10 @@
                 </a:rPr>
                 <a:t>PDS</a:t>
               </a:r>
-              <a:endParaRPr lang="en-US" sz="1200" dirty="0">
-                <a:solidFill>
-                  <a:srgbClr val="7030A0"/>
-                </a:solidFill>
-              </a:endParaRPr>
             </a:p>
           </p:txBody>
         </p:sp>
       </p:grpSp>
-      <p:sp>
-        <p:nvSpPr>
-          <p:cNvPr id="22" name="Rectangle 21"/>
-          <p:cNvSpPr/>
-          <p:nvPr/>
-        </p:nvSpPr>
-        <p:spPr>
-          <a:xfrm>
-            <a:off x="6683644" y="4335788"/>
-            <a:ext cx="2613761" cy="230832"/>
-          </a:xfrm>
-          <a:prstGeom prst="rect">
-            <a:avLst/>
-          </a:prstGeom>
-        </p:spPr>
-        <p:txBody>
-          <a:bodyPr wrap="square">
-            <a:spAutoFit/>
-          </a:bodyPr>
-          <a:lstStyle/>
-          <a:p>
-            <a:r>
-              <a:rPr lang="en-US" sz="900" dirty="0"/>
-              <a:t>https://www.youtube.com/@AmelOline/videos</a:t>
-            </a:r>
-          </a:p>
-        </p:txBody>
-      </p:sp>
-      <p:sp>
-        <p:nvSpPr>
-          <p:cNvPr id="23" name="Rectangle 22"/>
-          <p:cNvSpPr/>
-          <p:nvPr/>
-        </p:nvSpPr>
-        <p:spPr>
-          <a:xfrm>
-            <a:off x="7520552" y="4197289"/>
-            <a:ext cx="1623448" cy="230832"/>
-          </a:xfrm>
-          <a:prstGeom prst="rect">
-            <a:avLst/>
-          </a:prstGeom>
-        </p:spPr>
-        <p:txBody>
-          <a:bodyPr wrap="square">
-            <a:spAutoFit/>
-          </a:bodyPr>
-          <a:lstStyle/>
-          <a:p>
-            <a:r>
-              <a:rPr lang="en-US" sz="900" dirty="0"/>
-              <a:t>https://github.com/siagianp</a:t>
-            </a:r>
-          </a:p>
-        </p:txBody>
-      </p:sp>
-      <p:sp>
-        <p:nvSpPr>
-          <p:cNvPr id="2" name="Rectangle 1"/>
-          <p:cNvSpPr/>
-          <p:nvPr/>
-        </p:nvSpPr>
-        <p:spPr>
-          <a:xfrm>
-            <a:off x="5707251" y="4474288"/>
-            <a:ext cx="3667194" cy="230832"/>
-          </a:xfrm>
-          <a:prstGeom prst="rect">
-            <a:avLst/>
-          </a:prstGeom>
-        </p:spPr>
-        <p:txBody>
-          <a:bodyPr wrap="square">
-            <a:spAutoFit/>
-          </a:bodyPr>
-          <a:lstStyle/>
-          <a:p>
-            <a:r>
-              <a:rPr lang="en-US" sz="900" dirty="0"/>
-              <a:t>https</a:t>
-            </a:r>
-            <a:r>
-              <a:rPr lang="en-US" sz="900" dirty="0"/>
-              <a:t>://github.com/amelcharolinesgn2/IoT_simulator-mqtt-NodeRed</a:t>
-            </a:r>
-            <a:endParaRPr lang="en-US" sz="900" dirty="0"/>
-          </a:p>
-        </p:txBody>
-      </p:sp>
       <p:pic>
         <p:nvPicPr>
           <p:cNvPr id="4" name="Picture 3"/>
@@ -6952,14 +6853,105 @@
       </p:sp>
       <p:sp>
         <p:nvSpPr>
-          <p:cNvPr id="3" name="Rectangle 2"/>
+          <p:cNvPr id="25" name="Rectangle 24"/>
           <p:cNvSpPr/>
           <p:nvPr/>
         </p:nvSpPr>
         <p:spPr>
           <a:xfrm>
-            <a:off x="6152941" y="4612787"/>
-            <a:ext cx="3204723" cy="230832"/>
+            <a:off x="6293303" y="4334599"/>
+            <a:ext cx="2218246" cy="169277"/>
+          </a:xfrm>
+          <a:prstGeom prst="rect">
+            <a:avLst/>
+          </a:prstGeom>
+        </p:spPr>
+        <p:txBody>
+          <a:bodyPr wrap="square">
+            <a:spAutoFit/>
+          </a:bodyPr>
+          <a:lstStyle/>
+          <a:p>
+            <a:r>
+              <a:rPr lang="en-US" sz="500" dirty="0"/>
+              <a:t>https</a:t>
+            </a:r>
+            <a:r>
+              <a:rPr lang="en-US" sz="500" dirty="0" smtClean="0"/>
+              <a:t>://github.com/amelcharolinesgn2/IoT_simulator-mqtt-NodeRed</a:t>
+            </a:r>
+            <a:endParaRPr lang="en-US" sz="500" dirty="0"/>
+          </a:p>
+        </p:txBody>
+      </p:sp>
+      <p:sp>
+        <p:nvSpPr>
+          <p:cNvPr id="28" name="Rectangle 27"/>
+          <p:cNvSpPr/>
+          <p:nvPr/>
+        </p:nvSpPr>
+        <p:spPr>
+          <a:xfrm>
+            <a:off x="6959886" y="3699685"/>
+            <a:ext cx="1301349" cy="150490"/>
+          </a:xfrm>
+          <a:prstGeom prst="rect">
+            <a:avLst/>
+          </a:prstGeom>
+        </p:spPr>
+        <p:txBody>
+          <a:bodyPr wrap="square">
+            <a:spAutoFit/>
+          </a:bodyPr>
+          <a:lstStyle/>
+          <a:p>
+            <a:pPr algn="r"/>
+            <a:r>
+              <a:rPr lang="en-US" sz="378" dirty="0"/>
+              <a:t>https://www.youtube.com/@AmelOline/videos</a:t>
+            </a:r>
+          </a:p>
+        </p:txBody>
+      </p:sp>
+      <p:sp>
+        <p:nvSpPr>
+          <p:cNvPr id="29" name="Rectangle 28"/>
+          <p:cNvSpPr/>
+          <p:nvPr/>
+        </p:nvSpPr>
+        <p:spPr>
+          <a:xfrm>
+            <a:off x="7372457" y="3637385"/>
+            <a:ext cx="879077" cy="150490"/>
+          </a:xfrm>
+          <a:prstGeom prst="rect">
+            <a:avLst/>
+          </a:prstGeom>
+        </p:spPr>
+        <p:txBody>
+          <a:bodyPr wrap="square">
+            <a:spAutoFit/>
+          </a:bodyPr>
+          <a:lstStyle/>
+          <a:p>
+            <a:pPr algn="r"/>
+            <a:r>
+              <a:rPr lang="en-US" sz="378" dirty="0"/>
+              <a:t>https://github.com/siagianp</a:t>
+            </a:r>
+          </a:p>
+        </p:txBody>
+      </p:sp>
+      <p:sp>
+        <p:nvSpPr>
+          <p:cNvPr id="30" name="Rectangle 29"/>
+          <p:cNvSpPr/>
+          <p:nvPr/>
+        </p:nvSpPr>
+        <p:spPr>
+          <a:xfrm>
+            <a:off x="6809154" y="3771284"/>
+            <a:ext cx="1452642" cy="150490"/>
           </a:xfrm>
           <a:prstGeom prst="rect">
             <a:avLst/>
@@ -6971,8 +6963,9 @@
           </a:bodyPr>
           <a:lstStyle/>
           <a:p>
-            <a:r>
-              <a:rPr lang="en-US" sz="900" dirty="0"/>
+            <a:pPr algn="r"/>
+            <a:r>
+              <a:rPr lang="en-US" sz="378" dirty="0"/>
               <a:t>https://github.com/amelcharolinesgn2/Cloud-Infrastructures</a:t>
             </a:r>
           </a:p>
@@ -6980,14 +6973,14 @@
       </p:sp>
       <p:sp>
         <p:nvSpPr>
-          <p:cNvPr id="24" name="Rectangle 23"/>
+          <p:cNvPr id="31" name="Rectangle 30"/>
           <p:cNvSpPr/>
           <p:nvPr/>
         </p:nvSpPr>
         <p:spPr>
           <a:xfrm>
-            <a:off x="5620344" y="4785911"/>
-            <a:ext cx="3839513" cy="230832"/>
+            <a:off x="6543056" y="3835310"/>
+            <a:ext cx="1718740" cy="150490"/>
           </a:xfrm>
           <a:prstGeom prst="rect">
             <a:avLst/>
@@ -6999,10 +6992,292 @@
           </a:bodyPr>
           <a:lstStyle/>
           <a:p>
-            <a:r>
-              <a:rPr lang="en-US" sz="900" dirty="0"/>
+            <a:pPr algn="r"/>
+            <a:r>
+              <a:rPr lang="en-US" sz="378" dirty="0"/>
               <a:t>https://github.com/amelcharolinesgn2/ClouD-Infrastructure-SISKA-2025</a:t>
             </a:r>
+          </a:p>
+        </p:txBody>
+      </p:sp>
+      <p:sp>
+        <p:nvSpPr>
+          <p:cNvPr id="32" name="Rectangle 31"/>
+          <p:cNvSpPr/>
+          <p:nvPr/>
+        </p:nvSpPr>
+        <p:spPr>
+          <a:xfrm>
+            <a:off x="6959886" y="3886253"/>
+            <a:ext cx="1301349" cy="150490"/>
+          </a:xfrm>
+          <a:prstGeom prst="rect">
+            <a:avLst/>
+          </a:prstGeom>
+        </p:spPr>
+        <p:txBody>
+          <a:bodyPr wrap="square">
+            <a:spAutoFit/>
+          </a:bodyPr>
+          <a:lstStyle/>
+          <a:p>
+            <a:pPr algn="r"/>
+            <a:r>
+              <a:rPr lang="en-US" sz="378" dirty="0"/>
+              <a:t>https://</a:t>
+            </a:r>
+            <a:r>
+              <a:rPr lang="en-US" sz="378" dirty="0" smtClean="0"/>
+              <a:t>github.com/amelcharolinesgn2/CCNA-1-v7</a:t>
+            </a:r>
+            <a:endParaRPr lang="en-US" sz="378" dirty="0"/>
+          </a:p>
+        </p:txBody>
+      </p:sp>
+      <p:sp>
+        <p:nvSpPr>
+          <p:cNvPr id="33" name="Rectangle 32"/>
+          <p:cNvSpPr/>
+          <p:nvPr/>
+        </p:nvSpPr>
+        <p:spPr>
+          <a:xfrm>
+            <a:off x="6959886" y="3947933"/>
+            <a:ext cx="1301349" cy="150490"/>
+          </a:xfrm>
+          <a:prstGeom prst="rect">
+            <a:avLst/>
+          </a:prstGeom>
+        </p:spPr>
+        <p:txBody>
+          <a:bodyPr wrap="square">
+            <a:spAutoFit/>
+          </a:bodyPr>
+          <a:lstStyle/>
+          <a:p>
+            <a:pPr algn="r"/>
+            <a:r>
+              <a:rPr lang="en-US" sz="378" dirty="0"/>
+              <a:t>https://</a:t>
+            </a:r>
+            <a:r>
+              <a:rPr lang="en-US" sz="378" dirty="0" smtClean="0"/>
+              <a:t>github.com/amelcharolinesgn2/CCNA-2-v7</a:t>
+            </a:r>
+            <a:endParaRPr lang="en-US" sz="378" dirty="0"/>
+          </a:p>
+        </p:txBody>
+      </p:sp>
+      <p:sp>
+        <p:nvSpPr>
+          <p:cNvPr id="34" name="Rectangle 33"/>
+          <p:cNvSpPr/>
+          <p:nvPr/>
+        </p:nvSpPr>
+        <p:spPr>
+          <a:xfrm>
+            <a:off x="6961008" y="4203821"/>
+            <a:ext cx="1301349" cy="208647"/>
+          </a:xfrm>
+          <a:prstGeom prst="rect">
+            <a:avLst/>
+          </a:prstGeom>
+        </p:spPr>
+        <p:txBody>
+          <a:bodyPr wrap="square">
+            <a:spAutoFit/>
+          </a:bodyPr>
+          <a:lstStyle/>
+          <a:p>
+            <a:pPr algn="r"/>
+            <a:r>
+              <a:rPr lang="en-US" sz="378" dirty="0">
+                <a:hlinkClick r:id="rId8"/>
+              </a:rPr>
+              <a:t>https://github.com/amelcharolinesgn2/AWS</a:t>
+            </a:r>
+            <a:r>
+              <a:rPr lang="en-US" sz="378" dirty="0"/>
+              <a:t> Certificate</a:t>
+            </a:r>
+          </a:p>
+        </p:txBody>
+      </p:sp>
+      <p:sp>
+        <p:nvSpPr>
+          <p:cNvPr id="35" name="Rectangle 34"/>
+          <p:cNvSpPr/>
+          <p:nvPr/>
+        </p:nvSpPr>
+        <p:spPr>
+          <a:xfrm>
+            <a:off x="6961008" y="4261978"/>
+            <a:ext cx="1301349" cy="150490"/>
+          </a:xfrm>
+          <a:prstGeom prst="rect">
+            <a:avLst/>
+          </a:prstGeom>
+        </p:spPr>
+        <p:txBody>
+          <a:bodyPr wrap="square">
+            <a:spAutoFit/>
+          </a:bodyPr>
+          <a:lstStyle/>
+          <a:p>
+            <a:pPr algn="r"/>
+            <a:r>
+              <a:rPr lang="en-US" sz="378" dirty="0">
+                <a:hlinkClick r:id="rId8"/>
+              </a:rPr>
+              <a:t>https://</a:t>
+            </a:r>
+            <a:r>
+              <a:rPr lang="en-US" sz="378" dirty="0" smtClean="0">
+                <a:hlinkClick r:id="rId8"/>
+              </a:rPr>
+              <a:t>github.com/amelcharolinesgn2/OpenStack</a:t>
+            </a:r>
+            <a:endParaRPr lang="en-US" sz="378" dirty="0"/>
+          </a:p>
+        </p:txBody>
+      </p:sp>
+      <p:sp>
+        <p:nvSpPr>
+          <p:cNvPr id="36" name="Rectangle 35"/>
+          <p:cNvSpPr/>
+          <p:nvPr/>
+        </p:nvSpPr>
+        <p:spPr>
+          <a:xfrm>
+            <a:off x="6960447" y="4145292"/>
+            <a:ext cx="1301349" cy="150490"/>
+          </a:xfrm>
+          <a:prstGeom prst="rect">
+            <a:avLst/>
+          </a:prstGeom>
+        </p:spPr>
+        <p:txBody>
+          <a:bodyPr wrap="square">
+            <a:spAutoFit/>
+          </a:bodyPr>
+          <a:lstStyle/>
+          <a:p>
+            <a:pPr algn="r"/>
+            <a:r>
+              <a:rPr lang="en-US" sz="378" dirty="0">
+                <a:hlinkClick r:id="rId8"/>
+              </a:rPr>
+              <a:t>https://</a:t>
+            </a:r>
+            <a:r>
+              <a:rPr lang="en-US" sz="378" dirty="0" smtClean="0">
+                <a:hlinkClick r:id="rId8"/>
+              </a:rPr>
+              <a:t>github.com/amelcharolinesgn2/CloudSim</a:t>
+            </a:r>
+            <a:endParaRPr lang="en-US" sz="378" dirty="0"/>
+          </a:p>
+        </p:txBody>
+      </p:sp>
+      <p:sp>
+        <p:nvSpPr>
+          <p:cNvPr id="37" name="Rectangle 36"/>
+          <p:cNvSpPr/>
+          <p:nvPr/>
+        </p:nvSpPr>
+        <p:spPr>
+          <a:xfrm>
+            <a:off x="6959325" y="4008043"/>
+            <a:ext cx="1301349" cy="150490"/>
+          </a:xfrm>
+          <a:prstGeom prst="rect">
+            <a:avLst/>
+          </a:prstGeom>
+        </p:spPr>
+        <p:txBody>
+          <a:bodyPr wrap="square">
+            <a:spAutoFit/>
+          </a:bodyPr>
+          <a:lstStyle/>
+          <a:p>
+            <a:pPr algn="r"/>
+            <a:r>
+              <a:rPr lang="en-US" sz="378" dirty="0"/>
+              <a:t>https://</a:t>
+            </a:r>
+            <a:r>
+              <a:rPr lang="en-US" sz="378" dirty="0" smtClean="0"/>
+              <a:t>github.com/amelcharolinesgn2/CCNA-3-v7</a:t>
+            </a:r>
+            <a:endParaRPr lang="en-US" sz="378" dirty="0"/>
+          </a:p>
+        </p:txBody>
+      </p:sp>
+      <p:sp>
+        <p:nvSpPr>
+          <p:cNvPr id="38" name="Rectangle 37"/>
+          <p:cNvSpPr/>
+          <p:nvPr/>
+        </p:nvSpPr>
+        <p:spPr>
+          <a:xfrm>
+            <a:off x="6959325" y="4056977"/>
+            <a:ext cx="1301349" cy="150490"/>
+          </a:xfrm>
+          <a:prstGeom prst="rect">
+            <a:avLst/>
+          </a:prstGeom>
+        </p:spPr>
+        <p:txBody>
+          <a:bodyPr wrap="square">
+            <a:spAutoFit/>
+          </a:bodyPr>
+          <a:lstStyle/>
+          <a:p>
+            <a:pPr algn="r"/>
+            <a:r>
+              <a:rPr lang="en-US" sz="378" dirty="0"/>
+              <a:t>https://</a:t>
+            </a:r>
+            <a:r>
+              <a:rPr lang="en-US" sz="378" dirty="0" smtClean="0"/>
+              <a:t>github.com/amelcharolinesgn2/CCNA-4-v7</a:t>
+            </a:r>
+            <a:endParaRPr lang="en-US" sz="378" dirty="0"/>
+          </a:p>
+        </p:txBody>
+      </p:sp>
+      <p:sp>
+        <p:nvSpPr>
+          <p:cNvPr id="39" name="Rectangle 38"/>
+          <p:cNvSpPr/>
+          <p:nvPr/>
+        </p:nvSpPr>
+        <p:spPr>
+          <a:xfrm>
+            <a:off x="6842644" y="4104718"/>
+            <a:ext cx="1408890" cy="150490"/>
+          </a:xfrm>
+          <a:prstGeom prst="rect">
+            <a:avLst/>
+          </a:prstGeom>
+        </p:spPr>
+        <p:txBody>
+          <a:bodyPr wrap="square">
+            <a:spAutoFit/>
+          </a:bodyPr>
+          <a:lstStyle/>
+          <a:p>
+            <a:pPr algn="r"/>
+            <a:r>
+              <a:rPr lang="en-US" sz="378" dirty="0"/>
+              <a:t>https://</a:t>
+            </a:r>
+            <a:r>
+              <a:rPr lang="en-US" sz="378" dirty="0" smtClean="0"/>
+              <a:t>github.com/amelcharolinesgn2/ANJAR_CCNP_Lab</a:t>
+            </a:r>
+            <a:endParaRPr lang="en-US" sz="378" dirty="0"/>
           </a:p>
         </p:txBody>
       </p:sp>
